--- a/synchronization_part_2/synchronization_part_2.pptx
+++ b/synchronization_part_2/synchronization_part_2.pptx
@@ -33388,9 +33388,9 @@
         <p:grpSpPr>
           <a:xfrm>
             <a:off x="4904226" y="1853287"/>
-            <a:ext cx="6767821" cy="3339964"/>
+            <a:ext cx="6767821" cy="3927580"/>
             <a:chOff x="3033610" y="1759019"/>
-            <a:chExt cx="6767821" cy="3339964"/>
+            <a:chExt cx="6767821" cy="3927580"/>
           </a:xfrm>
         </p:grpSpPr>
         <p:sp>
@@ -33403,8 +33403,8 @@
           </p:nvSpPr>
           <p:spPr bwMode="auto">
             <a:xfrm>
-              <a:off x="3033610" y="1873497"/>
-              <a:ext cx="6767821" cy="3225486"/>
+              <a:off x="3033610" y="1873496"/>
+              <a:ext cx="6767821" cy="3813103"/>
             </a:xfrm>
             <a:prstGeom prst="rect">
               <a:avLst/>
